--- a/docs/presentation/fragrance_questionnaire_architecture_v5.pptx
+++ b/docs/presentation/fragrance_questionnaire_architecture_v5.pptx
@@ -34736,11 +34736,23 @@
                 <a:cs typeface="Noto Sans"/>
                 <a:sym typeface="Noto Sans"/>
               </a:rPr>
-              <a:t>README上の現行構成。顧客・スタッフ・管理者の入口はあるが、会員/QR商品導線は未完成。</a:t>
-            </a:r>
-            <a:endParaRPr b="0" i="0" sz="920" u="none" cap="none" strike="noStrike">
-              <a:solidFill>
-                <a:schemeClr val="dk1"/>
+              <a:t>README上の現行構成。顧客・スタッフ・管理者の入口はあるが、会員/QR商品導線は未完成。QR商品作成依頼ページは存在するが、DB接続・状態管理・メール/通知連携が未完成</a:t>
+            </a:r>
+            <a:r>
+              <a:rPr lang="en-US" sz="920">
+                <a:solidFill>
+                  <a:srgbClr val="706E68"/>
+                </a:solidFill>
+                <a:latin typeface="Noto Sans"/>
+                <a:ea typeface="Noto Sans"/>
+                <a:cs typeface="Noto Sans"/>
+                <a:sym typeface="Noto Sans"/>
+              </a:rPr>
+              <a:t>。</a:t>
+            </a:r>
+            <a:endParaRPr sz="920">
+              <a:solidFill>
+                <a:srgbClr val="706E68"/>
               </a:solidFill>
               <a:latin typeface="Noto Sans"/>
               <a:ea typeface="Noto Sans"/>
